--- a/downloads/演示PPT_主题七.pptx
+++ b/downloads/演示PPT_主题七.pptx
@@ -23,8 +23,10 @@
     <p:sldId id="271" r:id="rId22"/>
     <p:sldId id="272" r:id="rId23"/>
     <p:sldId id="273" r:id="rId24"/>
+    <p:sldId id="280" r:id="rId31"/>
     <p:sldId id="274" r:id="rId25"/>
     <p:sldId id="275" r:id="rId26"/>
+    <p:sldId id="281" r:id="rId32"/>
     <p:sldId id="276" r:id="rId27"/>
     <p:sldId id="277" r:id="rId28"/>
     <p:sldId id="278" r:id="rId29"/>
@@ -3211,7 +3213,7 @@
               </a:defRPr>
             </a:pPr>
             <a:r>
-              <a:t>真实数据背书：Köln 厂-网-雨数据 +1h NSE 0.942</a:t>
+              <a:t>真实数据背书：Köln 厂-网-雨数据 +1h NSE 0.943（+2h 0.807 / +3h 0.676）</a:t>
             </a:r>
           </a:p>
         </p:txBody>
@@ -3412,7 +3414,7 @@
               </a:defRPr>
             </a:pPr>
             <a:r>
-              <a:t>上游管网液位滞后项 + 降雨滞后项主导 —— 一体化信号 &gt; 仅厂内历史</a:t>
+              <a:t>上游管网液位滞后项 + 降雨滞后项主导（SHAP：历史进水 37% / 管网液位 34% / 降雨 15%）——一体化信号 &gt; 仅厂内历史</a:t>
             </a:r>
           </a:p>
         </p:txBody>
@@ -3489,7 +3491,7 @@
               </a:defRPr>
             </a:pPr>
             <a:r>
-              <a:t>泰和场景迁移：+2h 预测 NSE 0.92</a:t>
+              <a:t>泰和场景迁移：+2h 预测 NSE 0.972（+1h 0.983 / +3h 0.956，模拟场景）</a:t>
             </a:r>
           </a:p>
         </p:txBody>
@@ -3714,7 +3716,7 @@
               </a:defRPr>
             </a:pPr>
             <a:r>
-              <a:t>COD：当前模拟机理下可预测性受限（NSE≈0，仍优于基线）——已诚实标注，改进方向：SWMM 水质机理 / 预测负荷 / 事件分类预警</a:t>
+              <a:t>COD 浓度：模拟机理下可预测性受限（+2h NSE −0.047，已诚实标注）；改进已落地：负荷口径 0.77~0.80 + 冲击事件分类预警</a:t>
             </a:r>
           </a:p>
         </p:txBody>
@@ -3896,7 +3898,7 @@
               </a:defRPr>
             </a:pPr>
             <a:r>
-              <a:t>LightGBM 全工况最优，胜过 MLP/季节朴素/persistence 三重基线；P10–P90 分位数区间（PICP≈72%）支撑按最坏情形 P90 预警</a:t>
+              <a:t>LightGBM 在 Köln 全提前量最优，泰和与 LSTM/MLP 相当；P10–P90 分位数区间（PICP≈72%，未校准）支撑分级预警演示</a:t>
             </a:r>
           </a:p>
         </p:txBody>
@@ -3949,7 +3951,7 @@
               </a:defRPr>
             </a:pPr>
             <a:r>
-              <a:t>水质口径优化：COD 负荷预测 NSE 0.78~0.84</a:t>
+              <a:t>水质口径优化：COD 负荷预测 NSE 0.77~0.80（氨氮负荷 0.914）</a:t>
             </a:r>
           </a:p>
         </p:txBody>
@@ -4212,7 +4214,7 @@
               </a:defRPr>
             </a:pPr>
             <a:r>
-              <a:t>蓝：加强监视 → 黄：雨前预抽空 → 橙：总站错峰 30~60min → 红：限流 70% + 调蓄；效益推算：预抽空可腾容积 ≈4.4 万m³，测试段橙色超阈体积全部可拦截（模拟推算）</a:t>
+              <a:t>蓝：加强监视 → 黄：雨前预抽空 → 橙：总站错峰 30~60min → 红：限流 70% + 调蓄；效益推算：预抽空可腾容积 ≈4.37 万m³；测试段无橙/红超阈事件，削峰拦截率不适用（模拟推算）</a:t>
             </a:r>
           </a:p>
         </p:txBody>
@@ -4265,7 +4267,7 @@
               </a:defRPr>
             </a:pPr>
             <a:r>
-              <a:t>雨预报输入：短历时尖峰预警能力补齐（PR#4）</a:t>
+              <a:t>雨预报输入：短历时尖峰预警能力补齐</a:t>
             </a:r>
           </a:p>
         </p:txBody>
@@ -4361,7 +4363,7 @@
               </a:defRPr>
             </a:pPr>
             <a:r>
-              <a:t>无雨预报：黄色事件召回 69%，橙色 25%（+2h NSE 0.922）</a:t>
+              <a:t>无雨预报：+2h NSE 0.972；含噪短临雨预报：0.982；理想上限：0.983</a:t>
             </a:r>
           </a:p>
           <a:p>
@@ -4376,7 +4378,7 @@
               </a:defRPr>
             </a:pPr>
             <a:r>
-              <a:t>含噪短临雨预报（σ=0.3 噪声+起报阈值）：黄/橙召回均到 100%，NSE 0.949</a:t>
+              <a:t>橙色误报事件段：9（无雨）→ 8（含噪）→ 4（理想）——雨预报同时改善精度与误报</a:t>
             </a:r>
           </a:p>
           <a:p>
@@ -4391,7 +4393,7 @@
               </a:defRPr>
             </a:pPr>
             <a:r>
-              <a:t>理想雨预报上限：NSE 0.956</a:t>
+              <a:t>黄色事件 7/7 命中；橙色无真事件（不能报告召回）</a:t>
             </a:r>
           </a:p>
           <a:p>
@@ -4421,7 +4423,7 @@
               </a:defRPr>
             </a:pPr>
             <a:r>
-              <a:t>深度模型对照：LSTM +2h NSE 0.913 &lt; LightGBM 0.922，树模型选型有据</a:t>
+              <a:t>深度模型对照：LSTM +2h 0.970 ≈ LightGBM 0.972，训练耗时高一个数量级——树模型选型有据</a:t>
             </a:r>
           </a:p>
         </p:txBody>
@@ -4474,7 +4476,7 @@
               </a:defRPr>
             </a:pPr>
             <a:r>
-              <a:t>极端场景压力测试：设计暴雨 + 台风实况回放（PR#2/#7）</a:t>
+              <a:t>极端场景压力测试：设计暴雨 + 台风实况回放</a:t>
             </a:r>
           </a:p>
         </p:txBody>
@@ -4579,7 +4581,7 @@
               </a:defRPr>
             </a:pPr>
             <a:r>
-              <a:t>上海暴雨强度公式+Keifer-Chu 雨型：P=100a 基准模型洪峰低估 94% → P5/P50 增广后 NSE 0.935、峰值误差 −28%；台风烟花实况 NSE 0.705</a:t>
+              <a:t>上海暴雨强度公式+芝加哥雨型：P=100a 基准 NSE 0.149、洪峰低估 85% → P5/P50 增广后 NSE 0.954、峰值误差 −11%（P5/P50 已入训，不再独立）；台风烟花实况 NSE 0.917</a:t>
             </a:r>
           </a:p>
         </p:txBody>
@@ -4632,7 +4634,7 @@
               </a:defRPr>
             </a:pPr>
             <a:r>
-              <a:t>SWMM 在环滚动优化调度：削峰—冒溢权衡（PR#5）</a:t>
+              <a:t>SWMM 在环滚动优化调度：削峰—冒溢权衡</a:t>
             </a:r>
           </a:p>
         </p:txBody>
@@ -4737,7 +4739,7 @@
               </a:defRPr>
             </a:pPr>
             <a:r>
-              <a:t>概化 SWMM 物理模型 + pyswmm 每 5min 下发泵指令：雨前预抽空→峰中错峰→峰后恢复；激进限排超阈体积 −89%（冒溢 +6%），稳健版冒溢不增 −28%</a:t>
+              <a:t>概化 SWMM 物理模型 + pyswmm 每 5min 下发泵指令：雨前预抽空→峰中错峰→峰后恢复；激进限排超阈体积 −89%（冒溢 +6.2%）；稳健版削 28% 且冒溢不增</a:t>
             </a:r>
           </a:p>
         </p:txBody>
@@ -4916,7 +4918,7 @@
               </a:defRPr>
             </a:pPr>
             <a:r>
-              <a:t>机会：上游管网/泵站信号天然领先厂前 0.5~3 小时（输送延迟）</a:t>
+              <a:t>机会：上游管网/泵站信号天然领先厂前 0.3~3.6 小时（输送延迟）</a:t>
             </a:r>
           </a:p>
           <a:p>
@@ -4984,7 +4986,7 @@
               </a:defRPr>
             </a:pPr>
             <a:r>
-              <a:t>污染冲击异常分类预警 + 氨氮负荷预测（PR#3）</a:t>
+              <a:t>污染冲击异常分类预警 + 氨氮负荷预测</a:t>
             </a:r>
           </a:p>
         </p:txBody>
@@ -5065,7 +5067,7 @@
               </a:defRPr>
             </a:pPr>
             <a:r>
-              <a:t>氨氮负荷（浓度×流量）+1h/+2h/+3h 预测 NSE ≈0.92，水质双指标负荷预测</a:t>
+              <a:t>氨氮负荷（浓度×流量）+1h/+2h/+3h 预测 NSE 0.914，COD 负荷 0.77~0.80——水质双指标负荷预测</a:t>
             </a:r>
           </a:p>
           <a:p>
@@ -5528,7 +5530,7 @@
               </a:defRPr>
             </a:pPr>
             <a:r>
-              <a:t>数据目录 DATA_CATALOG.md：17 类数据集来源/许可逐项登记</a:t>
+              <a:t>数据目录 DATA_CATALOG.md：15 类数据集来源/许可逐项登记</a:t>
             </a:r>
           </a:p>
           <a:p>
@@ -5543,7 +5545,7 @@
               </a:defRPr>
             </a:pPr>
             <a:r>
-              <a:t>工程化：7 项单元测试 + GitHub Actions CI + requirements-lock 依赖锁定</a:t>
+              <a:t>工程化：22 项单元测试 + GitHub Actions CI + requirements-lock 依赖锁定 + 183 项谱系 SHA-256 核验</a:t>
             </a:r>
           </a:p>
         </p:txBody>
@@ -5707,7 +5709,7 @@
               </a:defRPr>
             </a:pPr>
             <a:r>
-              <a:t>真实数据背书：Köln +1h NSE 0.942；泰和 +3h NSE 0.92，COD 负荷 0.78~0.84</a:t>
+              <a:t>真实数据背书：Köln 0.943 / 0.807 / 0.676；泰和（模拟）0.983 / 0.972 / 0.956，COD 负荷 0.77~0.80</a:t>
             </a:r>
           </a:p>
           <a:p>
@@ -5752,7 +5754,7 @@
               </a:defRPr>
             </a:pPr>
             <a:r>
-              <a:t>SWMM 在环滚动调度：超阈体积 −89%；雨预报输入：黄/橙事件召回升至 100%</a:t>
+              <a:t>SWMM 在环滚动调度：超阈体积 −89%（激进）/ −28%（稳健·冒溢不增）；容错：全液位计离线 NSE 0.773</a:t>
             </a:r>
           </a:p>
           <a:p>
@@ -5767,7 +5769,7 @@
               </a:defRPr>
             </a:pPr>
             <a:r>
-              <a:t>极端压力测试 + 设计暴雨增广：P=100a NSE 0.134→0.935；异常分类预警链路打通</a:t>
+              <a:t>极端压力测试 + 设计暴雨增广：P=100a NSE 0.149→0.954；真实跨厂迁移验证：有效但不及本地训练</a:t>
             </a:r>
           </a:p>
           <a:p>
@@ -5866,6 +5868,394 @@
             </a:pPr>
             <a:r>
               <a:t>谢谢观看 · 敬请指正</a:t>
+            </a:r>
+          </a:p>
+        </p:txBody>
+      </p:sp>
+    </p:spTree>
+  </p:cSld>
+  <p:clrMapOvr>
+    <a:masterClrMapping/>
+  </p:clrMapOvr>
+</p:sld>
+</file>
+
+<file path=ppt/slides/slide25.xml><?xml version="1.0" encoding="utf-8"?>
+<p:sld xmlns:a="http://schemas.openxmlformats.org/drawingml/2006/main" xmlns:p="http://schemas.openxmlformats.org/presentationml/2006/main" xmlns:r="http://schemas.openxmlformats.org/officeDocument/2006/relationships">
+  <p:cSld>
+    <p:spTree>
+      <p:nvGrpSpPr>
+        <p:cNvPr id="1" name=""/>
+        <p:cNvGrpSpPr/>
+        <p:nvPr/>
+      </p:nvGrpSpPr>
+      <p:grpSpPr/>
+      <p:sp>
+        <p:nvSpPr>
+          <p:cNvPr id="2" name="TextBox 1"/>
+          <p:cNvSpPr txBox="1"/>
+          <p:nvPr/>
+        </p:nvSpPr>
+        <p:spPr>
+          <a:xfrm>
+            <a:off x="457200" y="228600"/>
+            <a:ext cx="11247120" cy="731520"/>
+          </a:xfrm>
+          <a:prstGeom prst="rect">
+            <a:avLst/>
+          </a:prstGeom>
+          <a:noFill/>
+        </p:spPr>
+        <p:txBody>
+          <a:bodyPr wrap="none">
+            <a:spAutoFit/>
+          </a:bodyPr>
+          <a:lstStyle/>
+          <a:p>
+            <a:pPr>
+              <a:defRPr sz="2800" b="1">
+                <a:solidFill>
+                  <a:srgbClr val="00695C"/>
+                </a:solidFill>
+              </a:defRPr>
+            </a:pPr>
+            <a:r>
+              <a:t>泛化性验证（二）：两座真实厂跨厂迁移（Köln ↔ 丹麦 DHI）</a:t>
+            </a:r>
+          </a:p>
+        </p:txBody>
+      </p:sp>
+      <p:sp>
+        <p:nvSpPr>
+          <p:cNvPr id="3" name="Rectangle 2"/>
+          <p:cNvSpPr/>
+          <p:nvPr/>
+        </p:nvSpPr>
+        <p:spPr>
+          <a:xfrm>
+            <a:off x="457200" y="960120"/>
+            <a:ext cx="11247120" cy="25400"/>
+          </a:xfrm>
+          <a:prstGeom prst="rect">
+            <a:avLst/>
+          </a:prstGeom>
+          <a:solidFill>
+            <a:srgbClr val="00695C"/>
+          </a:solidFill>
+          <a:ln>
+            <a:noFill/>
+          </a:ln>
+        </p:spPr>
+        <p:style>
+          <a:lnRef idx="1">
+            <a:schemeClr val="accent1"/>
+          </a:lnRef>
+          <a:fillRef idx="3">
+            <a:schemeClr val="accent1"/>
+          </a:fillRef>
+          <a:effectRef idx="2">
+            <a:schemeClr val="accent1"/>
+          </a:effectRef>
+          <a:fontRef idx="minor">
+            <a:schemeClr val="lt1"/>
+          </a:fontRef>
+        </p:style>
+        <p:txBody>
+          <a:bodyPr rtlCol="0" anchor="ctr"/>
+          <a:lstStyle/>
+          <a:p>
+            <a:pPr algn="ctr"/>
+          </a:p>
+        </p:txBody>
+      </p:sp>
+      <p:sp>
+        <p:nvSpPr>
+          <p:cNvPr id="4" name="TextBox 3"/>
+          <p:cNvSpPr txBox="1"/>
+          <p:nvPr/>
+        </p:nvSpPr>
+        <p:spPr>
+          <a:xfrm>
+            <a:off x="640080" y="1280160"/>
+            <a:ext cx="10972800" cy="5120640"/>
+          </a:xfrm>
+          <a:prstGeom prst="rect">
+            <a:avLst/>
+          </a:prstGeom>
+          <a:noFill/>
+        </p:spPr>
+        <p:txBody>
+          <a:bodyPr wrap="square">
+            <a:spAutoFit/>
+          </a:bodyPr>
+          <a:lstStyle/>
+          <a:p>
+            <a:pPr>
+              <a:spcAft>
+                <a:spcPts val="800"/>
+              </a:spcAft>
+              <a:defRPr sz="1800">
+                <a:solidFill>
+                  <a:srgbClr val="263238"/>
+                </a:solidFill>
+              </a:defRPr>
+            </a:pPr>
+            <a:r>
+              <a:t>两厂共同输入只有进水 + 降雨；进水除以发布时刻前 7 天滚动中位数（尺度只取已观测历史，零标签）</a:t>
+            </a:r>
+          </a:p>
+          <a:p>
+            <a:pPr>
+              <a:spcAft>
+                <a:spcPts val="800"/>
+              </a:spcAft>
+              <a:defRPr sz="1800">
+                <a:solidFill>
+                  <a:srgbClr val="263238"/>
+                </a:solidFill>
+              </a:defRPr>
+            </a:pPr>
+            <a:r>
+              <a:t>+2h 零标签直迁：Köln→丹麦 0.511（当前值 0.695）；丹麦→Köln 0.708（当前值 0.657）</a:t>
+            </a:r>
+          </a:p>
+          <a:p>
+            <a:pPr lvl="1">
+              <a:spcAft>
+                <a:spcPts val="800"/>
+              </a:spcAft>
+              <a:defRPr sz="1500">
+                <a:solidFill>
+                  <a:srgbClr val="546E7A"/>
+                </a:solidFill>
+              </a:defRPr>
+            </a:pPr>
+            <a:r>
+              <a:t>目标厂本地训练：0.677 / 0.837——直迁有效，但始终不及本地训练</a:t>
+            </a:r>
+          </a:p>
+          <a:p>
+            <a:pPr lvl="1">
+              <a:spcAft>
+                <a:spcPts val="800"/>
+              </a:spcAft>
+              <a:defRPr sz="1500">
+                <a:solidFill>
+                  <a:srgbClr val="546E7A"/>
+                </a:solidFill>
+              </a:defRPr>
+            </a:pPr>
+            <a:r>
+              <a:t>+前 7 天标签续训可部分弥补（0.622 / 0.717）</a:t>
+            </a:r>
+          </a:p>
+          <a:p>
+            <a:pPr>
+              <a:spcAft>
+                <a:spcPts val="800"/>
+              </a:spcAft>
+              <a:defRPr sz="1800">
+                <a:solidFill>
+                  <a:srgbClr val="263238"/>
+                </a:solidFill>
+              </a:defRPr>
+            </a:pPr>
+            <a:r>
+              <a:t>结论：新厂上线必须先用本厂数据旁路评估 / 重训；两座厂不足以推断任意厂泛化</a:t>
+            </a:r>
+          </a:p>
+        </p:txBody>
+      </p:sp>
+    </p:spTree>
+  </p:cSld>
+  <p:clrMapOvr>
+    <a:masterClrMapping/>
+  </p:clrMapOvr>
+</p:sld>
+</file>
+
+<file path=ppt/slides/slide26.xml><?xml version="1.0" encoding="utf-8"?>
+<p:sld xmlns:a="http://schemas.openxmlformats.org/drawingml/2006/main" xmlns:p="http://schemas.openxmlformats.org/presentationml/2006/main" xmlns:r="http://schemas.openxmlformats.org/officeDocument/2006/relationships">
+  <p:cSld>
+    <p:spTree>
+      <p:nvGrpSpPr>
+        <p:cNvPr id="1" name=""/>
+        <p:cNvGrpSpPr/>
+        <p:nvPr/>
+      </p:nvGrpSpPr>
+      <p:grpSpPr/>
+      <p:sp>
+        <p:nvSpPr>
+          <p:cNvPr id="2" name="TextBox 1"/>
+          <p:cNvSpPr txBox="1"/>
+          <p:nvPr/>
+        </p:nvSpPr>
+        <p:spPr>
+          <a:xfrm>
+            <a:off x="457200" y="228600"/>
+            <a:ext cx="11247120" cy="731520"/>
+          </a:xfrm>
+          <a:prstGeom prst="rect">
+            <a:avLst/>
+          </a:prstGeom>
+          <a:noFill/>
+        </p:spPr>
+        <p:txBody>
+          <a:bodyPr wrap="none">
+            <a:spAutoFit/>
+          </a:bodyPr>
+          <a:lstStyle/>
+          <a:p>
+            <a:pPr>
+              <a:defRPr sz="2800" b="1">
+                <a:solidFill>
+                  <a:srgbClr val="00695C"/>
+                </a:solidFill>
+              </a:defRPr>
+            </a:pPr>
+            <a:r>
+              <a:t>现场工程化：传感器容错 · 漂移监控 · 谱系核验</a:t>
+            </a:r>
+          </a:p>
+        </p:txBody>
+      </p:sp>
+      <p:sp>
+        <p:nvSpPr>
+          <p:cNvPr id="3" name="Rectangle 2"/>
+          <p:cNvSpPr/>
+          <p:nvPr/>
+        </p:nvSpPr>
+        <p:spPr>
+          <a:xfrm>
+            <a:off x="457200" y="960120"/>
+            <a:ext cx="11247120" cy="25400"/>
+          </a:xfrm>
+          <a:prstGeom prst="rect">
+            <a:avLst/>
+          </a:prstGeom>
+          <a:solidFill>
+            <a:srgbClr val="00695C"/>
+          </a:solidFill>
+          <a:ln>
+            <a:noFill/>
+          </a:ln>
+        </p:spPr>
+        <p:style>
+          <a:lnRef idx="1">
+            <a:schemeClr val="accent1"/>
+          </a:lnRef>
+          <a:fillRef idx="3">
+            <a:schemeClr val="accent1"/>
+          </a:fillRef>
+          <a:effectRef idx="2">
+            <a:schemeClr val="accent1"/>
+          </a:effectRef>
+          <a:fontRef idx="minor">
+            <a:schemeClr val="lt1"/>
+          </a:fontRef>
+        </p:style>
+        <p:txBody>
+          <a:bodyPr rtlCol="0" anchor="ctr"/>
+          <a:lstStyle/>
+          <a:p>
+            <a:pPr algn="ctr"/>
+          </a:p>
+        </p:txBody>
+      </p:sp>
+      <p:sp>
+        <p:nvSpPr>
+          <p:cNvPr id="4" name="TextBox 3"/>
+          <p:cNvSpPr txBox="1"/>
+          <p:nvPr/>
+        </p:nvSpPr>
+        <p:spPr>
+          <a:xfrm>
+            <a:off x="640080" y="1280160"/>
+            <a:ext cx="10972800" cy="5120640"/>
+          </a:xfrm>
+          <a:prstGeom prst="rect">
+            <a:avLst/>
+          </a:prstGeom>
+          <a:noFill/>
+        </p:spPr>
+        <p:txBody>
+          <a:bodyPr wrap="square">
+            <a:spAutoFit/>
+          </a:bodyPr>
+          <a:lstStyle/>
+          <a:p>
+            <a:pPr>
+              <a:spcAft>
+                <a:spcPts val="800"/>
+              </a:spcAft>
+              <a:defRPr sz="1800">
+                <a:solidFill>
+                  <a:srgbClr val="263238"/>
+                </a:solidFill>
+              </a:defRPr>
+            </a:pPr>
+            <a:r>
+              <a:t>质量控制：量程 / 跳变 / 卡死阈值从训练段学习；≤30min 缺测向前填充，更长判离线</a:t>
+            </a:r>
+          </a:p>
+          <a:p>
+            <a:pPr>
+              <a:spcAft>
+                <a:spcPts val="800"/>
+              </a:spcAft>
+              <a:defRPr sz="1800">
+                <a:solidFill>
+                  <a:srgbClr val="263238"/>
+                </a:solidFill>
+              </a:defRPr>
+            </a:pPr>
+            <a:r>
+              <a:t>缺测增广训练；过半液位计离线自动切「进水+降雨」简化模型；进水计全断拒绝预测（不编造）</a:t>
+            </a:r>
+          </a:p>
+          <a:p>
+            <a:pPr lvl="1">
+              <a:spcAft>
+                <a:spcPts val="800"/>
+              </a:spcAft>
+              <a:defRPr sz="1500">
+                <a:solidFill>
+                  <a:srgbClr val="546E7A"/>
+                </a:solidFill>
+              </a:defRPr>
+            </a:pPr>
+            <a:r>
+              <a:t>Köln +2h 全液位计离线：容错 0.773 vs 常规补齐 0.708 vs 严格模式可服务率 0</a:t>
+            </a:r>
+          </a:p>
+          <a:p>
+            <a:pPr lvl="1">
+              <a:spcAft>
+                <a:spcPts val="800"/>
+              </a:spcAft>
+              <a:defRPr sz="1500">
+                <a:solidFill>
+                  <a:srgbClr val="546E7A"/>
+                </a:solidFill>
+              </a:defRPr>
+            </a:pPr>
+            <a:r>
+              <a:t>漂移监控：滚动 1 天 MAE 超 1.5× 验证期=关注、超 2× 且不如当前值=失准 → 自动回退当前值</a:t>
+            </a:r>
+          </a:p>
+          <a:p>
+            <a:pPr>
+              <a:spcAft>
+                <a:spcPts val="800"/>
+              </a:spcAft>
+              <a:defRPr sz="1800">
+                <a:solidFill>
+                  <a:srgbClr val="263238"/>
+                </a:solidFill>
+              </a:defRPr>
+            </a:pPr>
+            <a:r>
+              <a:t>谱系：183 项 SHA-256 逐项可核验；22 项单元测试 + CI 每次 push 自动运行</a:t>
             </a:r>
           </a:p>
         </p:txBody>
@@ -6396,7 +6786,7 @@
               </a:defRPr>
             </a:pPr>
             <a:r>
-              <a:t>③ 国际公开真实代理：Köln 厂-网-雨一体化、Graz、Milan、BSM2 等 17 类（280MB）</a:t>
+              <a:t>③ 国际公开真实代理：Köln 厂-网-雨一体化、Graz、Milan、BSM2 等 15 类（约 330MB）</a:t>
             </a:r>
           </a:p>
           <a:p>
